--- a/engine/svx/qa/unit/data/tdf148000_CurvedTextWidth.pptx
+++ b/engine/svx/qa/unit/data/tdf148000_CurvedTextWidth.pptx
@@ -3619,7 +3619,7 @@
                   <a:solidFill>
                     <a:srgbClr val="ff0000"/>
                   </a:solidFill>
-                  <a:latin typeface="Poppins Medium"/>
+                  <a:latin typeface="Liberation Sans"/>
                   <a:ea typeface="DejaVu Sans"/>
                 </a:rPr>
                 <a:t>OOOOOOO</a:t>
@@ -3631,7 +3631,7 @@
                 <a:solidFill>
                   <a:srgbClr val="ff0000"/>
                 </a:solidFill>
-                <a:latin typeface="Poppins Medium"/>
+                <a:latin typeface="Liberation Sans"/>
                 <a:ea typeface="DejaVu Sans"/>
               </a:endParaRPr>
             </a:p>
@@ -3649,7 +3649,7 @@
                   <a:solidFill>
                     <a:srgbClr val="ff0000"/>
                   </a:solidFill>
-                  <a:latin typeface="Poppins Medium"/>
+                  <a:latin typeface="Liberation Sans"/>
                   <a:ea typeface="DejaVu Sans"/>
                 </a:rPr>
                 <a:t>OOOOOOO</a:t>
@@ -3665,7 +3665,7 @@
                   <a:solidFill>
                     <a:srgbClr val="ff0000"/>
                   </a:solidFill>
-                  <a:latin typeface="Poppins Medium"/>
+                  <a:latin typeface="Liberation Sans"/>
                   <a:ea typeface="DejaVu Sans"/>
                 </a:rPr>
                 <a:t>OOOOOOO</a:t>
@@ -3677,7 +3677,7 @@
                 <a:solidFill>
                   <a:srgbClr val="ff0000"/>
                 </a:solidFill>
-                <a:latin typeface="Poppins Medium"/>
+                <a:latin typeface="Liberation Sans"/>
                 <a:ea typeface="DejaVu Sans"/>
               </a:endParaRPr>
             </a:p>
@@ -3695,7 +3695,7 @@
                   <a:solidFill>
                     <a:srgbClr val="ff0000"/>
                   </a:solidFill>
-                  <a:latin typeface="Poppins Medium"/>
+                  <a:latin typeface="Liberation Sans"/>
                   <a:ea typeface="DejaVu Sans"/>
                 </a:rPr>
                 <a:t>OOOOOOO</a:t>
@@ -3711,7 +3711,7 @@
                   <a:solidFill>
                     <a:srgbClr val="ff0000"/>
                   </a:solidFill>
-                  <a:latin typeface="Poppins Medium"/>
+                  <a:latin typeface="Liberation Sans"/>
                   <a:ea typeface="DejaVu Sans"/>
                 </a:rPr>
                 <a:t>OOOOOOO</a:t>
@@ -3723,7 +3723,7 @@
                 <a:solidFill>
                   <a:srgbClr val="ff0000"/>
                 </a:solidFill>
-                <a:latin typeface="Poppins Medium"/>
+                <a:latin typeface="Liberation Sans"/>
                 <a:ea typeface="DejaVu Sans"/>
               </a:endParaRPr>
             </a:p>
@@ -3741,7 +3741,7 @@
                   <a:solidFill>
                     <a:srgbClr val="ff0000"/>
                   </a:solidFill>
-                  <a:latin typeface="Poppins Medium"/>
+                  <a:latin typeface="Liberation Sans"/>
                   <a:ea typeface="DejaVu Sans"/>
                 </a:rPr>
                 <a:t>OOOOOOO</a:t>
@@ -3757,7 +3757,7 @@
                   <a:solidFill>
                     <a:srgbClr val="ff0000"/>
                   </a:solidFill>
-                  <a:latin typeface="Poppins Medium"/>
+                  <a:latin typeface="Liberation Sans"/>
                   <a:ea typeface="DejaVu Sans"/>
                 </a:rPr>
                 <a:t>OOOOOOO</a:t>
@@ -3769,7 +3769,7 @@
                 <a:solidFill>
                   <a:srgbClr val="ff0000"/>
                 </a:solidFill>
-                <a:latin typeface="Poppins Medium"/>
+                <a:latin typeface="Liberation Sans"/>
                 <a:ea typeface="DejaVu Sans"/>
               </a:endParaRPr>
             </a:p>
